--- a/Task2/nairobi-slide.pptx
+++ b/Task2/nairobi-slide.pptx
@@ -3504,7 +3504,7 @@
                         </a:defRPr>
                       </a:pPr>
                       <a:r>
-                        <a:t>$3 250/мес</a:t>
+                        <a:t>$1 570/мес</a:t>
                       </a:r>
                     </a:p>
                   </a:txBody>
@@ -3527,7 +3527,7 @@
                         </a:defRPr>
                       </a:pPr>
                       <a:r>
-                        <a:t>$7 150/мес</a:t>
+                        <a:t>$4 140/мес</a:t>
                       </a:r>
                     </a:p>
                   </a:txBody>
@@ -3550,7 +3550,7 @@
                         </a:defRPr>
                       </a:pPr>
                       <a:r>
-                        <a:t>$17 740/мес</a:t>
+                        <a:t>$9 130/мес</a:t>
                       </a:r>
                     </a:p>
                   </a:txBody>
@@ -3598,7 +3598,7 @@
                         </a:defRPr>
                       </a:pPr>
                       <a:r>
-                        <a:t>$5,7 млн</a:t>
+                        <a:t>$5,0 млн</a:t>
                       </a:r>
                     </a:p>
                   </a:txBody>
@@ -3621,7 +3621,7 @@
                         </a:defRPr>
                       </a:pPr>
                       <a:r>
-                        <a:t>$8,1 млн</a:t>
+                        <a:t>$7,2 млн</a:t>
                       </a:r>
                     </a:p>
                   </a:txBody>
@@ -3644,7 +3644,7 @@
                         </a:defRPr>
                       </a:pPr>
                       <a:r>
-                        <a:t>$12,1 млн</a:t>
+                        <a:t>$10,0 млн</a:t>
                       </a:r>
                     </a:p>
                   </a:txBody>
@@ -3692,7 +3692,7 @@
                         </a:defRPr>
                       </a:pPr>
                       <a:r>
-                        <a:t>$3,03 / $0,86</a:t>
+                        <a:t>$2,94 / $0,85</a:t>
                       </a:r>
                     </a:p>
                   </a:txBody>
@@ -3715,7 +3715,7 @@
                         </a:defRPr>
                       </a:pPr>
                       <a:r>
-                        <a:t>$4,07 / $0,98</a:t>
+                        <a:t>$3,92 / $0,96</a:t>
                       </a:r>
                     </a:p>
                   </a:txBody>
@@ -3738,7 +3738,7 @@
                         </a:defRPr>
                       </a:pPr>
                       <a:r>
-                        <a:t>$6,55 / $1,23</a:t>
+                        <a:t>$6,12 / $1,16</a:t>
                       </a:r>
                     </a:p>
                   </a:txBody>
@@ -3809,7 +3809,7 @@
                         </a:defRPr>
                       </a:pPr>
                       <a:r>
-                        <a:t>&gt; $11,1k</a:t>
+                        <a:t>&gt; $10,0k</a:t>
                       </a:r>
                     </a:p>
                   </a:txBody>
@@ -3832,7 +3832,7 @@
                         </a:defRPr>
                       </a:pPr>
                       <a:r>
-                        <a:t>&gt; $11,4k</a:t>
+                        <a:t>&gt; $9,1k</a:t>
                       </a:r>
                     </a:p>
                   </a:txBody>
@@ -3888,7 +3888,7 @@
                   <a:srgbClr val="444444"/>
                 </a:solidFill>
               </a:rPr>
-              <a:t>Цена ошибки «строим под 10M, приходит 50k» - $1,31 млн. «Строим малое и растём» - $180k без переписывания.</a:t>
+              <a:t>Цена ошибки «строим под 10M, приходит 50k» - $1,22 млн. «Строим малое и растём» - $180k без переписывания.</a:t>
             </a:r>
           </a:p>
         </p:txBody>
@@ -3988,7 +3988,7 @@
                   <a:srgbClr val="444444"/>
                 </a:solidFill>
               </a:rPr>
-              <a:t>• Active-active - GMV/мин × 3 &gt; $11k или Год 3</a:t>
+              <a:t>• Active-active - GMV/мин × 3 &gt; $9k или Год 3</a:t>
             </a:r>
           </a:p>
           <a:p>
@@ -4142,7 +4142,7 @@
                   <a:srgbClr val="444444"/>
                 </a:solidFill>
               </a:rPr>
-              <a:t>Инвестор - SLO 99,9% в Год 1 и скоуп MVP.  CFO - $3 250/мес и локальный провайдер в Нигерии.  CTO - правила модульности и триггеры выделения сервисов.  CEO - список того, что не входит в 15.10.</a:t>
+              <a:t>Инвестор - SLO 99,9% в Год 1 и скоуп MVP.  CFO - $1 570/мес и локальный провайдер в Нигерии.  CTO - правила модульности и триггеры выделения сервисов.  CEO - список того, что не входит в 15.10.</a:t>
             </a:r>
           </a:p>
         </p:txBody>

--- a/Task2/nairobi-slide.pptx
+++ b/Task2/nairobi-slide.pptx
@@ -3888,7 +3888,7 @@
                   <a:srgbClr val="444444"/>
                 </a:solidFill>
               </a:rPr>
-              <a:t>Цена ошибки «строим под 10M, приходит 50k» - $1,22 млн. «Строим малое и растём» - $180k без переписывания.</a:t>
+              <a:t>Цена ошибки «строим под 10M, приходит 50k» - $1,22 млн. «Строим малое и растём» - $190k без переписывания.</a:t>
             </a:r>
           </a:p>
         </p:txBody>
@@ -3958,7 +3958,7 @@
                   <a:srgbClr val="444444"/>
                 </a:solidFill>
               </a:rPr>
-              <a:t>• Kubernetes, Istio - больше 5 сервисов</a:t>
+              <a:t>• Kubernetes, Istio, ArgoCD - больше 5 сервисов</a:t>
             </a:r>
           </a:p>
           <a:p>
